--- a/downloads/DCT_V1_Ch10_Slides.pptx
+++ b/downloads/DCT_V1_Ch10_Slides.pptx
@@ -130,7 +130,7 @@
   <p:extLst>
     <p:ext uri="{521415D9-36F7-43E2-AB2F-B90AF26B5E84}">
       <p14:sectionLst xmlns:p14="http://schemas.microsoft.com/office/powerpoint/2010/main">
-        <p14:section name="Opening" id="{860c190a-b810-4c9e-9c26-d5d4efdcd81d}">
+        <p14:section name="Opening" id="{4332b672-0f24-5373-6661-29d63985997f}">
           <p14:sldIdLst>
             <p14:sldId id="256"/>
             <p14:sldId id="257"/>
@@ -138,50 +138,50 @@
             <p14:sldId id="259"/>
           </p14:sldIdLst>
         </p14:section>
-        <p14:section name="10.1 Why Capital Is More Than Money" id="{e8ad9aa4-709d-7749-e0de-d2f4a29e6e11}">
+        <p14:section name="10.1 Why Capital Is More Than Money" id="{14e62433-f688-fafd-f7f2-0682554e6401}">
           <p14:sldIdLst>
             <p14:sldId id="260"/>
           </p14:sldIdLst>
         </p14:section>
-        <p14:section name="10.2 Capital Beyond Finance" id="{2b7e3a0d-4856-1066-cae7-3515b8ff96b9}">
+        <p14:section name="10.2 Capital Beyond Finance" id="{8981ca25-34f9-4072-31f1-7bb45466b592}">
           <p14:sldIdLst>
             <p14:sldId id="261"/>
           </p14:sldIdLst>
         </p14:section>
-        <p14:section name="10.3 The Enterprise Capital Architecture" id="{d87d331f-a012-0fe7-94dc-c00c1525dfb3}">
+        <p14:section name="10.3 The Enterprise Capital Architecture" id="{fdb3f59a-de35-268e-2585-50af8af21a04}">
           <p14:sldIdLst>
             <p14:sldId id="262"/>
           </p14:sldIdLst>
         </p14:section>
-        <p14:section name="10.4 The Forms of Enterprise Capital" id="{96f2ac72-1c47-bf85-d9da-af8e5edf6d7d}">
+        <p14:section name="10.4 The Forms of Enterprise Capital" id="{1f82cfe9-42de-facc-5ace-c415a4cb4a83}">
           <p14:sldIdLst>
             <p14:sldId id="263"/>
             <p14:sldId id="264"/>
           </p14:sldIdLst>
         </p14:section>
-        <p14:section name="10.5 Capital Dependencies" id="{0f7c1168-3c7a-9233-25ba-38e328c81003}">
+        <p14:section name="10.5 Capital Dependencies" id="{fded7e48-2b2a-c8ee-2206-40fd85445cbc}">
           <p14:sldIdLst>
             <p14:sldId id="265"/>
           </p14:sldIdLst>
         </p14:section>
-        <p14:section name="10.6 Capital Accumulation and Depletion" id="{53b08f30-e4d2-22f7-3f62-7e43ee7f6987}">
+        <p14:section name="10.6 Capital Accumulation and Depletion" id="{ff31bd4a-5a82-2c3f-2ea2-86bd09eca36e}">
           <p14:sldIdLst>
             <p14:sldId id="266"/>
             <p14:sldId id="267"/>
           </p14:sldIdLst>
         </p14:section>
-        <p14:section name="10.7 Capital Allocation and Productivity" id="{cba4588d-288a-8621-8915-4a35a6ffb4e7}">
+        <p14:section name="10.7 Capital Allocation and Productivity" id="{0c013744-e11b-8e2f-a84a-9619b7b76f59}">
           <p14:sldIdLst>
             <p14:sldId id="268"/>
           </p14:sldIdLst>
         </p14:section>
-        <p14:section name="10.8 Architecture Consistency and Capital Dynamics" id="{35c4114f-6332-4890-6447-2584310fbb60}">
+        <p14:section name="10.8 Architecture Consistency and Capital Dynamics" id="{af4ec3fa-6301-ad1d-50ea-6214ff13e90d}">
           <p14:sldIdLst>
             <p14:sldId id="269"/>
             <p14:sldId id="270"/>
           </p14:sldIdLst>
         </p14:section>
-        <p14:section name="Worked Example 10.1" id="{3c0a60ac-7186-f1d6-82a9-0f36310ed20a}">
+        <p14:section name="Worked Example 10.1" id="{3acbb41e-02b0-0ac4-22a0-a20ec604a469}">
           <p14:sldIdLst>
             <p14:sldId id="271"/>
             <p14:sldId id="272"/>
@@ -190,12 +190,12 @@
             <p14:sldId id="275"/>
           </p14:sldIdLst>
         </p14:section>
-        <p14:section name="AXIOM Lab 1.10" id="{560ffd65-ff14-52c8-f88a-ba94a30eaf18}">
+        <p14:section name="AXIOM Lab 1.10" id="{10589fe6-a54b-cce3-ff70-e6ad150e7a14}">
           <p14:sldIdLst>
             <p14:sldId id="276"/>
           </p14:sldIdLst>
         </p14:section>
-        <p14:section name="Close" id="{15447866-a9d7-64e2-f1fb-cd70e70a3941}">
+        <p14:section name="Close" id="{ebd6b47f-cecc-4bc2-f246-b4d79153c481}">
           <p14:sldIdLst>
             <p14:sldId id="277"/>
             <p14:sldId id="278"/>

--- a/downloads/DCT_V1_Ch10_Slides.pptx
+++ b/downloads/DCT_V1_Ch10_Slides.pptx
@@ -130,7 +130,7 @@
   <p:extLst>
     <p:ext uri="{521415D9-36F7-43E2-AB2F-B90AF26B5E84}">
       <p14:sectionLst xmlns:p14="http://schemas.microsoft.com/office/powerpoint/2010/main">
-        <p14:section name="Opening" id="{4332b672-0f24-5373-6661-29d63985997f}">
+        <p14:section name="Opening" id="{370e546f-85be-bc1a-7164-9ab9dac39107}">
           <p14:sldIdLst>
             <p14:sldId id="256"/>
             <p14:sldId id="257"/>
@@ -138,50 +138,50 @@
             <p14:sldId id="259"/>
           </p14:sldIdLst>
         </p14:section>
-        <p14:section name="10.1 Why Capital Is More Than Money" id="{14e62433-f688-fafd-f7f2-0682554e6401}">
+        <p14:section name="10.1 Why Capital Is More Than Money" id="{5912686e-df2c-3372-e05c-6b86210d0806}">
           <p14:sldIdLst>
             <p14:sldId id="260"/>
           </p14:sldIdLst>
         </p14:section>
-        <p14:section name="10.2 Capital Beyond Finance" id="{8981ca25-34f9-4072-31f1-7bb45466b592}">
+        <p14:section name="10.2 Capital Beyond Finance" id="{ab211bb8-ca15-f392-5126-1a809779a978}">
           <p14:sldIdLst>
             <p14:sldId id="261"/>
           </p14:sldIdLst>
         </p14:section>
-        <p14:section name="10.3 The Enterprise Capital Architecture" id="{fdb3f59a-de35-268e-2585-50af8af21a04}">
+        <p14:section name="10.3 The Enterprise Capital Architecture" id="{e02037c9-e002-5899-7c55-24d6480f8284}">
           <p14:sldIdLst>
             <p14:sldId id="262"/>
           </p14:sldIdLst>
         </p14:section>
-        <p14:section name="10.4 The Forms of Enterprise Capital" id="{1f82cfe9-42de-facc-5ace-c415a4cb4a83}">
+        <p14:section name="10.4 The Forms of Enterprise Capital" id="{1d4d8ce8-0903-192c-e893-0550097b7b8b}">
           <p14:sldIdLst>
             <p14:sldId id="263"/>
             <p14:sldId id="264"/>
           </p14:sldIdLst>
         </p14:section>
-        <p14:section name="10.5 Capital Dependencies" id="{fded7e48-2b2a-c8ee-2206-40fd85445cbc}">
+        <p14:section name="10.5 Capital Dependencies" id="{87b05201-5f0d-64ee-bc0c-c777bb93932a}">
           <p14:sldIdLst>
             <p14:sldId id="265"/>
           </p14:sldIdLst>
         </p14:section>
-        <p14:section name="10.6 Capital Accumulation and Depletion" id="{ff31bd4a-5a82-2c3f-2ea2-86bd09eca36e}">
+        <p14:section name="10.6 Capital Accumulation and Depletion" id="{cd4e3154-0783-1d62-39b7-0df96dc5de74}">
           <p14:sldIdLst>
             <p14:sldId id="266"/>
             <p14:sldId id="267"/>
           </p14:sldIdLst>
         </p14:section>
-        <p14:section name="10.7 Capital Allocation and Productivity" id="{0c013744-e11b-8e2f-a84a-9619b7b76f59}">
+        <p14:section name="10.7 Capital Allocation and Productivity" id="{2da664ab-183a-b0cd-ece6-30d5668a70af}">
           <p14:sldIdLst>
             <p14:sldId id="268"/>
           </p14:sldIdLst>
         </p14:section>
-        <p14:section name="10.8 Architecture Consistency and Capital Dynamics" id="{af4ec3fa-6301-ad1d-50ea-6214ff13e90d}">
+        <p14:section name="10.8 Architecture Consistency and Capital Dynamics" id="{1ffdd7e0-e438-a6b4-f457-be13bf496722}">
           <p14:sldIdLst>
             <p14:sldId id="269"/>
             <p14:sldId id="270"/>
           </p14:sldIdLst>
         </p14:section>
-        <p14:section name="Worked Example 10.1" id="{3acbb41e-02b0-0ac4-22a0-a20ec604a469}">
+        <p14:section name="Worked Example 10.1" id="{76a49d46-f9a9-f614-b3d0-4c70f54eca27}">
           <p14:sldIdLst>
             <p14:sldId id="271"/>
             <p14:sldId id="272"/>
@@ -190,12 +190,12 @@
             <p14:sldId id="275"/>
           </p14:sldIdLst>
         </p14:section>
-        <p14:section name="AXIOM Lab 1.10" id="{10589fe6-a54b-cce3-ff70-e6ad150e7a14}">
+        <p14:section name="AXIOM Lab 1.10" id="{537e1ae3-075c-d134-6867-060a65814cfa}">
           <p14:sldIdLst>
             <p14:sldId id="276"/>
           </p14:sldIdLst>
         </p14:section>
-        <p14:section name="Close" id="{ebd6b47f-cecc-4bc2-f246-b4d79153c481}">
+        <p14:section name="Close" id="{993f5ad7-9735-a513-61e9-8999ead88b39}">
           <p14:sldIdLst>
             <p14:sldId id="277"/>
             <p14:sldId id="278"/>
